--- a/技术文档/草稿 V3/block直角坐标系示意图.pptx
+++ b/技术文档/草稿 V3/block直角坐标系示意图.pptx
@@ -104,6 +104,11 @@
       </a:defRPr>
     </a:lvl9pPr>
   </p:defaultTextStyle>
+  <p:extLst>
+    <p:ext uri="{EFAFB233-063F-42B5-8137-9DF3F51BA10A}">
+      <p15:sldGuideLst xmlns:p15="http://schemas.microsoft.com/office/powerpoint/2012/main"/>
+    </p:ext>
+  </p:extLst>
 </p:presentation>
 </file>
 
@@ -254,7 +259,7 @@
           <a:p>
             <a:fld id="{DADE3AC0-E8BC-4EB2-989E-6498B43A7D7A}" type="datetimeFigureOut">
               <a:rPr lang="en-US" smtClean="0"/>
-              <a:t>5/9/2025</a:t>
+              <a:t>5/12/2025</a:t>
             </a:fld>
             <a:endParaRPr lang="en-US"/>
           </a:p>
@@ -452,7 +457,7 @@
           <a:p>
             <a:fld id="{DADE3AC0-E8BC-4EB2-989E-6498B43A7D7A}" type="datetimeFigureOut">
               <a:rPr lang="en-US" smtClean="0"/>
-              <a:t>5/9/2025</a:t>
+              <a:t>5/12/2025</a:t>
             </a:fld>
             <a:endParaRPr lang="en-US"/>
           </a:p>
@@ -660,7 +665,7 @@
           <a:p>
             <a:fld id="{DADE3AC0-E8BC-4EB2-989E-6498B43A7D7A}" type="datetimeFigureOut">
               <a:rPr lang="en-US" smtClean="0"/>
-              <a:t>5/9/2025</a:t>
+              <a:t>5/12/2025</a:t>
             </a:fld>
             <a:endParaRPr lang="en-US"/>
           </a:p>
@@ -858,7 +863,7 @@
           <a:p>
             <a:fld id="{DADE3AC0-E8BC-4EB2-989E-6498B43A7D7A}" type="datetimeFigureOut">
               <a:rPr lang="en-US" smtClean="0"/>
-              <a:t>5/9/2025</a:t>
+              <a:t>5/12/2025</a:t>
             </a:fld>
             <a:endParaRPr lang="en-US"/>
           </a:p>
@@ -1133,7 +1138,7 @@
           <a:p>
             <a:fld id="{DADE3AC0-E8BC-4EB2-989E-6498B43A7D7A}" type="datetimeFigureOut">
               <a:rPr lang="en-US" smtClean="0"/>
-              <a:t>5/9/2025</a:t>
+              <a:t>5/12/2025</a:t>
             </a:fld>
             <a:endParaRPr lang="en-US"/>
           </a:p>
@@ -1398,7 +1403,7 @@
           <a:p>
             <a:fld id="{DADE3AC0-E8BC-4EB2-989E-6498B43A7D7A}" type="datetimeFigureOut">
               <a:rPr lang="en-US" smtClean="0"/>
-              <a:t>5/9/2025</a:t>
+              <a:t>5/12/2025</a:t>
             </a:fld>
             <a:endParaRPr lang="en-US"/>
           </a:p>
@@ -1810,7 +1815,7 @@
           <a:p>
             <a:fld id="{DADE3AC0-E8BC-4EB2-989E-6498B43A7D7A}" type="datetimeFigureOut">
               <a:rPr lang="en-US" smtClean="0"/>
-              <a:t>5/9/2025</a:t>
+              <a:t>5/12/2025</a:t>
             </a:fld>
             <a:endParaRPr lang="en-US"/>
           </a:p>
@@ -1951,7 +1956,7 @@
           <a:p>
             <a:fld id="{DADE3AC0-E8BC-4EB2-989E-6498B43A7D7A}" type="datetimeFigureOut">
               <a:rPr lang="en-US" smtClean="0"/>
-              <a:t>5/9/2025</a:t>
+              <a:t>5/12/2025</a:t>
             </a:fld>
             <a:endParaRPr lang="en-US"/>
           </a:p>
@@ -2064,7 +2069,7 @@
           <a:p>
             <a:fld id="{DADE3AC0-E8BC-4EB2-989E-6498B43A7D7A}" type="datetimeFigureOut">
               <a:rPr lang="en-US" smtClean="0"/>
-              <a:t>5/9/2025</a:t>
+              <a:t>5/12/2025</a:t>
             </a:fld>
             <a:endParaRPr lang="en-US"/>
           </a:p>
@@ -2375,7 +2380,7 @@
           <a:p>
             <a:fld id="{DADE3AC0-E8BC-4EB2-989E-6498B43A7D7A}" type="datetimeFigureOut">
               <a:rPr lang="en-US" smtClean="0"/>
-              <a:t>5/9/2025</a:t>
+              <a:t>5/12/2025</a:t>
             </a:fld>
             <a:endParaRPr lang="en-US"/>
           </a:p>
@@ -2663,7 +2668,7 @@
           <a:p>
             <a:fld id="{DADE3AC0-E8BC-4EB2-989E-6498B43A7D7A}" type="datetimeFigureOut">
               <a:rPr lang="en-US" smtClean="0"/>
-              <a:t>5/9/2025</a:t>
+              <a:t>5/12/2025</a:t>
             </a:fld>
             <a:endParaRPr lang="en-US"/>
           </a:p>
@@ -2904,7 +2909,7 @@
           <a:p>
             <a:fld id="{DADE3AC0-E8BC-4EB2-989E-6498B43A7D7A}" type="datetimeFigureOut">
               <a:rPr lang="en-US" smtClean="0"/>
-              <a:t>5/9/2025</a:t>
+              <a:t>5/12/2025</a:t>
             </a:fld>
             <a:endParaRPr lang="en-US"/>
           </a:p>
@@ -4310,8 +4315,8 @@
             </a:fontRef>
           </p:style>
         </p:cxnSp>
-        <mc:AlternateContent xmlns:mc="http://schemas.openxmlformats.org/markup-compatibility/2006">
-          <mc:Choice xmlns:a14="http://schemas.microsoft.com/office/drawing/2010/main" Requires="a14">
+        <mc:AlternateContent xmlns:mc="http://schemas.openxmlformats.org/markup-compatibility/2006" xmlns:a14="http://schemas.microsoft.com/office/drawing/2010/main">
+          <mc:Choice Requires="a14">
             <p:sp>
               <p:nvSpPr>
                 <p:cNvPr id="38" name="TextBox 37">
@@ -4340,6 +4345,7 @@
                 </a:bodyPr>
                 <a:lstStyle/>
                 <a:p>
+                  <a:pPr/>
                   <a14:m>
                     <m:oMathPara xmlns:m="http://schemas.openxmlformats.org/officeDocument/2006/math">
                       <m:oMathParaPr>
@@ -4372,7 +4378,7 @@
               </p:txBody>
             </p:sp>
           </mc:Choice>
-          <mc:Fallback>
+          <mc:Fallback xmlns="">
             <p:sp>
               <p:nvSpPr>
                 <p:cNvPr id="38" name="TextBox 37">
@@ -4417,8 +4423,8 @@
             </p:sp>
           </mc:Fallback>
         </mc:AlternateContent>
-        <mc:AlternateContent xmlns:mc="http://schemas.openxmlformats.org/markup-compatibility/2006">
-          <mc:Choice xmlns:a14="http://schemas.microsoft.com/office/drawing/2010/main" Requires="a14">
+        <mc:AlternateContent xmlns:mc="http://schemas.openxmlformats.org/markup-compatibility/2006" xmlns:a14="http://schemas.microsoft.com/office/drawing/2010/main">
+          <mc:Choice Requires="a14">
             <p:sp>
               <p:nvSpPr>
                 <p:cNvPr id="39" name="TextBox 38">
@@ -4447,6 +4453,7 @@
                 </a:bodyPr>
                 <a:lstStyle/>
                 <a:p>
+                  <a:pPr/>
                   <a14:m>
                     <m:oMathPara xmlns:m="http://schemas.openxmlformats.org/officeDocument/2006/math">
                       <m:oMathParaPr>
@@ -4479,7 +4486,7 @@
               </p:txBody>
             </p:sp>
           </mc:Choice>
-          <mc:Fallback>
+          <mc:Fallback xmlns="">
             <p:sp>
               <p:nvSpPr>
                 <p:cNvPr id="39" name="TextBox 38">
@@ -4554,6 +4561,7 @@
                 </a:bodyPr>
                 <a:lstStyle/>
                 <a:p>
+                  <a:pPr/>
                   <a14:m>
                     <m:oMathPara xmlns:m="http://schemas.openxmlformats.org/officeDocument/2006/math">
                       <m:oMathParaPr>
@@ -4580,7 +4588,7 @@
                 <a:p>
                   <a:r>
                     <a:rPr lang="en-US"/>
-                    <a:t>East</a:t>
+                    <a:t>Up</a:t>
                   </a:r>
                 </a:p>
               </p:txBody>
@@ -4612,7 +4620,7 @@
                 <a:blipFill>
                   <a:blip r:embed="rId4"/>
                   <a:stretch>
-                    <a:fillRect l="-7692" r="-5769" b="-15094"/>
+                    <a:fillRect l="-7692" b="-15094"/>
                   </a:stretch>
                 </a:blipFill>
               </p:spPr>
